--- a/training/decks/t2-sermon-thursday.pptx
+++ b/training/decks/t2-sermon-thursday.pptx
@@ -504,7 +504,7 @@
           <a:lstStyle/>
           <a:p>
             <a:r>
-              <a:t>SURPRISE 4 (updated deck). Trainer, before this deck goes live, say:</a:t>
+              <a:t>SURPRISE 4 (updated deck). The trainer gave the cue during the reading:</a:t>
             </a:r>
           </a:p>
           <a:p>
@@ -514,7 +514,7 @@
           </a:p>
           <a:p>
             <a:r>
-              <a:t>Operator: do not use this one. Shift and Down to the next item, "Sermon (updated Sunday</a:t>
+              <a:t>Operator: if this deck is on air, blank first. Do not use this one. Shift and Down to the next item, "Sermon (updated Sunday</a:t>
             </a:r>
           </a:p>
           <a:p>
